--- a/docs/외부 강의 준비/59세, 바이브 코딩.pptx
+++ b/docs/외부 강의 준비/59세, 바이브 코딩.pptx
@@ -5,7 +5,7 @@
     <p:sldMasterId id="2147483648" r:id="rId1"/>
   </p:sldMasterIdLst>
   <p:notesMasterIdLst>
-    <p:notesMasterId r:id="rId14"/>
+    <p:notesMasterId r:id="rId15"/>
   </p:notesMasterIdLst>
   <p:sldIdLst>
     <p:sldId id="256" r:id="rId2"/>
@@ -20,6 +20,7 @@
     <p:sldId id="280" r:id="rId11"/>
     <p:sldId id="281" r:id="rId12"/>
     <p:sldId id="282" r:id="rId13"/>
+    <p:sldId id="283" r:id="rId14"/>
   </p:sldIdLst>
   <p:sldSz cx="12192000" cy="6858000"/>
   <p:notesSz cx="6858000" cy="9144000"/>
@@ -208,7 +209,7 @@
           <a:p>
             <a:fld id="{1DD71565-DC36-4A70-B25E-E49DE8FE06D7}" type="datetimeFigureOut">
               <a:rPr lang="ko-KR" altLang="en-US" smtClean="0"/>
-              <a:t>2025-11-06</a:t>
+              <a:t>2025-11-11</a:t>
             </a:fld>
             <a:endParaRPr lang="ko-KR" altLang="en-US"/>
           </a:p>
@@ -17227,7 +17228,7 @@
           <a:p>
             <a:fld id="{C4E1A2AE-3823-4084-9EAF-2283ED587D9B}" type="datetimeFigureOut">
               <a:rPr lang="ko-KR" altLang="en-US" smtClean="0"/>
-              <a:t>2025-11-06</a:t>
+              <a:t>2025-11-11</a:t>
             </a:fld>
             <a:endParaRPr lang="ko-KR" altLang="en-US"/>
           </a:p>
@@ -17425,7 +17426,7 @@
           <a:p>
             <a:fld id="{C4E1A2AE-3823-4084-9EAF-2283ED587D9B}" type="datetimeFigureOut">
               <a:rPr lang="ko-KR" altLang="en-US" smtClean="0"/>
-              <a:t>2025-11-06</a:t>
+              <a:t>2025-11-11</a:t>
             </a:fld>
             <a:endParaRPr lang="ko-KR" altLang="en-US"/>
           </a:p>
@@ -17633,7 +17634,7 @@
           <a:p>
             <a:fld id="{C4E1A2AE-3823-4084-9EAF-2283ED587D9B}" type="datetimeFigureOut">
               <a:rPr lang="ko-KR" altLang="en-US" smtClean="0"/>
-              <a:t>2025-11-06</a:t>
+              <a:t>2025-11-11</a:t>
             </a:fld>
             <a:endParaRPr lang="ko-KR" altLang="en-US"/>
           </a:p>
@@ -17831,7 +17832,7 @@
           <a:p>
             <a:fld id="{C4E1A2AE-3823-4084-9EAF-2283ED587D9B}" type="datetimeFigureOut">
               <a:rPr lang="ko-KR" altLang="en-US" smtClean="0"/>
-              <a:t>2025-11-06</a:t>
+              <a:t>2025-11-11</a:t>
             </a:fld>
             <a:endParaRPr lang="ko-KR" altLang="en-US"/>
           </a:p>
@@ -18106,7 +18107,7 @@
           <a:p>
             <a:fld id="{C4E1A2AE-3823-4084-9EAF-2283ED587D9B}" type="datetimeFigureOut">
               <a:rPr lang="ko-KR" altLang="en-US" smtClean="0"/>
-              <a:t>2025-11-06</a:t>
+              <a:t>2025-11-11</a:t>
             </a:fld>
             <a:endParaRPr lang="ko-KR" altLang="en-US"/>
           </a:p>
@@ -18371,7 +18372,7 @@
           <a:p>
             <a:fld id="{C4E1A2AE-3823-4084-9EAF-2283ED587D9B}" type="datetimeFigureOut">
               <a:rPr lang="ko-KR" altLang="en-US" smtClean="0"/>
-              <a:t>2025-11-06</a:t>
+              <a:t>2025-11-11</a:t>
             </a:fld>
             <a:endParaRPr lang="ko-KR" altLang="en-US"/>
           </a:p>
@@ -18783,7 +18784,7 @@
           <a:p>
             <a:fld id="{C4E1A2AE-3823-4084-9EAF-2283ED587D9B}" type="datetimeFigureOut">
               <a:rPr lang="ko-KR" altLang="en-US" smtClean="0"/>
-              <a:t>2025-11-06</a:t>
+              <a:t>2025-11-11</a:t>
             </a:fld>
             <a:endParaRPr lang="ko-KR" altLang="en-US"/>
           </a:p>
@@ -18924,7 +18925,7 @@
           <a:p>
             <a:fld id="{C4E1A2AE-3823-4084-9EAF-2283ED587D9B}" type="datetimeFigureOut">
               <a:rPr lang="ko-KR" altLang="en-US" smtClean="0"/>
-              <a:t>2025-11-06</a:t>
+              <a:t>2025-11-11</a:t>
             </a:fld>
             <a:endParaRPr lang="ko-KR" altLang="en-US"/>
           </a:p>
@@ -19037,7 +19038,7 @@
           <a:p>
             <a:fld id="{C4E1A2AE-3823-4084-9EAF-2283ED587D9B}" type="datetimeFigureOut">
               <a:rPr lang="ko-KR" altLang="en-US" smtClean="0"/>
-              <a:t>2025-11-06</a:t>
+              <a:t>2025-11-11</a:t>
             </a:fld>
             <a:endParaRPr lang="ko-KR" altLang="en-US"/>
           </a:p>
@@ -19348,7 +19349,7 @@
           <a:p>
             <a:fld id="{C4E1A2AE-3823-4084-9EAF-2283ED587D9B}" type="datetimeFigureOut">
               <a:rPr lang="ko-KR" altLang="en-US" smtClean="0"/>
-              <a:t>2025-11-06</a:t>
+              <a:t>2025-11-11</a:t>
             </a:fld>
             <a:endParaRPr lang="ko-KR" altLang="en-US"/>
           </a:p>
@@ -19636,7 +19637,7 @@
           <a:p>
             <a:fld id="{C4E1A2AE-3823-4084-9EAF-2283ED587D9B}" type="datetimeFigureOut">
               <a:rPr lang="ko-KR" altLang="en-US" smtClean="0"/>
-              <a:t>2025-11-06</a:t>
+              <a:t>2025-11-11</a:t>
             </a:fld>
             <a:endParaRPr lang="ko-KR" altLang="en-US"/>
           </a:p>
@@ -19877,7 +19878,7 @@
           <a:p>
             <a:fld id="{C4E1A2AE-3823-4084-9EAF-2283ED587D9B}" type="datetimeFigureOut">
               <a:rPr lang="ko-KR" altLang="en-US" smtClean="0"/>
-              <a:t>2025-11-06</a:t>
+              <a:t>2025-11-11</a:t>
             </a:fld>
             <a:endParaRPr lang="ko-KR" altLang="en-US"/>
           </a:p>
@@ -22878,6 +22879,142 @@
     <p:extLst>
       <p:ext uri="{BB962C8B-B14F-4D97-AF65-F5344CB8AC3E}">
         <p14:creationId xmlns:p14="http://schemas.microsoft.com/office/powerpoint/2010/main" val="247749404"/>
+      </p:ext>
+    </p:extLst>
+  </p:cSld>
+  <p:clrMapOvr>
+    <a:masterClrMapping/>
+  </p:clrMapOvr>
+</p:sld>
+</file>
+
+<file path=ppt/slides/slide13.xml><?xml version="1.0" encoding="utf-8"?>
+<p:sld xmlns:a="http://schemas.openxmlformats.org/drawingml/2006/main" xmlns:r="http://schemas.openxmlformats.org/officeDocument/2006/relationships" xmlns:p="http://schemas.openxmlformats.org/presentationml/2006/main">
+  <p:cSld>
+    <p:spTree>
+      <p:nvGrpSpPr>
+        <p:cNvPr id="1" name=""/>
+        <p:cNvGrpSpPr/>
+        <p:nvPr/>
+      </p:nvGrpSpPr>
+      <p:grpSpPr>
+        <a:xfrm>
+          <a:off x="0" y="0"/>
+          <a:ext cx="0" cy="0"/>
+          <a:chOff x="0" y="0"/>
+          <a:chExt cx="0" cy="0"/>
+        </a:xfrm>
+      </p:grpSpPr>
+      <p:sp>
+        <p:nvSpPr>
+          <p:cNvPr id="4" name="직사각형 3">
+            <a:extLst>
+              <a:ext uri="{FF2B5EF4-FFF2-40B4-BE49-F238E27FC236}">
+                <a16:creationId xmlns:a16="http://schemas.microsoft.com/office/drawing/2014/main" id="{587BBE6E-71FA-9F01-BB04-D172CF8F29F0}"/>
+              </a:ext>
+            </a:extLst>
+          </p:cNvPr>
+          <p:cNvSpPr/>
+          <p:nvPr/>
+        </p:nvSpPr>
+        <p:spPr>
+          <a:xfrm>
+            <a:off x="316992" y="1389888"/>
+            <a:ext cx="11362944" cy="5266944"/>
+          </a:xfrm>
+          <a:prstGeom prst="rect">
+            <a:avLst/>
+          </a:prstGeom>
+        </p:spPr>
+        <p:style>
+          <a:lnRef idx="2">
+            <a:schemeClr val="accent1">
+              <a:shade val="15000"/>
+            </a:schemeClr>
+          </a:lnRef>
+          <a:fillRef idx="1">
+            <a:schemeClr val="accent1"/>
+          </a:fillRef>
+          <a:effectRef idx="0">
+            <a:schemeClr val="accent1"/>
+          </a:effectRef>
+          <a:fontRef idx="minor">
+            <a:schemeClr val="lt1"/>
+          </a:fontRef>
+        </p:style>
+        <p:txBody>
+          <a:bodyPr rtlCol="0" anchor="ctr"/>
+          <a:lstStyle/>
+          <a:p>
+            <a:pPr algn="ctr"/>
+            <a:endParaRPr lang="ko-KR" altLang="en-US"/>
+          </a:p>
+        </p:txBody>
+      </p:sp>
+      <p:sp>
+        <p:nvSpPr>
+          <p:cNvPr id="2" name="제목 1">
+            <a:extLst>
+              <a:ext uri="{FF2B5EF4-FFF2-40B4-BE49-F238E27FC236}">
+                <a16:creationId xmlns:a16="http://schemas.microsoft.com/office/drawing/2014/main" id="{9E562749-71FE-831E-789C-2A54FE0332A5}"/>
+              </a:ext>
+            </a:extLst>
+          </p:cNvPr>
+          <p:cNvSpPr>
+            <a:spLocks noGrp="1"/>
+          </p:cNvSpPr>
+          <p:nvPr>
+            <p:ph type="title"/>
+          </p:nvPr>
+        </p:nvSpPr>
+        <p:spPr/>
+        <p:txBody>
+          <a:bodyPr/>
+          <a:lstStyle/>
+          <a:p>
+            <a:endParaRPr lang="ko-KR" altLang="en-US"/>
+          </a:p>
+        </p:txBody>
+      </p:sp>
+      <p:pic>
+        <p:nvPicPr>
+          <p:cNvPr id="6" name="내용 개체 틀 5" descr="로고, 상징, 그래픽, 디자인이(가) 표시된 사진&#10;&#10;AI 생성 콘텐츠는 정확하지 않을 수 있습니다.">
+            <a:extLst>
+              <a:ext uri="{FF2B5EF4-FFF2-40B4-BE49-F238E27FC236}">
+                <a16:creationId xmlns:a16="http://schemas.microsoft.com/office/drawing/2014/main" id="{D347B419-4095-DDED-729E-F34F9DC7549F}"/>
+              </a:ext>
+            </a:extLst>
+          </p:cNvPr>
+          <p:cNvPicPr>
+            <a:picLocks noGrp="1" noChangeAspect="1"/>
+          </p:cNvPicPr>
+          <p:nvPr>
+            <p:ph idx="1"/>
+          </p:nvPr>
+        </p:nvPicPr>
+        <p:blipFill>
+          <a:blip r:embed="rId2">
+            <a:extLst>
+              <a:ext uri="{28A0092B-C50C-407E-A947-70E740481C1C}">
+                <a14:useLocalDpi xmlns:a14="http://schemas.microsoft.com/office/drawing/2010/main" val="0"/>
+              </a:ext>
+            </a:extLst>
+          </a:blip>
+          <a:stretch>
+            <a:fillRect/>
+          </a:stretch>
+        </p:blipFill>
+        <p:spPr>
+          <a:xfrm>
+            <a:off x="838200" y="2586450"/>
+            <a:ext cx="4838700" cy="1171575"/>
+          </a:xfrm>
+        </p:spPr>
+      </p:pic>
+    </p:spTree>
+    <p:extLst>
+      <p:ext uri="{BB962C8B-B14F-4D97-AF65-F5344CB8AC3E}">
+        <p14:creationId xmlns:p14="http://schemas.microsoft.com/office/powerpoint/2010/main" val="513009544"/>
       </p:ext>
     </p:extLst>
   </p:cSld>
